--- a/data/outputs/v2/Grade11/Biology/Quizzes/SS2.2_Growth_and_Development_in_Plants/Biology_G11_SS2.2_Growth_and_Development_in_Plants_L4_QuickCheck.pptx
+++ b/data/outputs/v2/Grade11/Biology/Quizzes/SS2.2_Growth_and_Development_in_Plants/Biology_G11_SS2.2_Growth_and_Development_in_Plants_L4_QuickCheck.pptx
@@ -1698,7 +1698,7 @@
                 <a:ea typeface="Arial" pitchFamily="34" charset="-122"/>
                 <a:cs typeface="Arial" pitchFamily="34" charset="-120"/>
               </a:rPr>
-              <a:t>Lesson 4: Germination: Process, Types and Conditions Necessary for Germination in Maize and Bean Seeds</a:t>
+              <a:t>Lesson 4: Germination: Conditions Necessary and Types (Hypogeal vs Epigeal) in Maize H614 and Rosecoco Beans</a:t>
             </a:r>
             <a:endParaRPr lang="en-US" sz="1600" dirty="0"/>
           </a:p>
@@ -2021,7 +2021,7 @@
                 <a:ea typeface="Arial" pitchFamily="34" charset="-122"/>
                 <a:cs typeface="Arial" pitchFamily="34" charset="-120"/>
               </a:rPr>
-              <a:t>A group sets up Container A (moist cotton wool) and Container B (dry cotton wool) to test whether maize and bean seeds need water to germinate. Which of these must be kept the SAME in both containers for the test to be fair?</a:t>
+              <a:t>Mr. Wafula's healthy, non-dormant maize and bean seeds were planted in the same field after the same rain, but some still failed to germinate. Which set lists the conditions a healthy, non-dormant seed needs in order to germinate?</a:t>
             </a:r>
             <a:endParaRPr lang="en-US" sz="1800" dirty="0"/>
           </a:p>
@@ -2121,7 +2121,7 @@
                 <a:ea typeface="Arial" pitchFamily="34" charset="-122"/>
                 <a:cs typeface="Arial" pitchFamily="34" charset="-120"/>
               </a:rPr>
-              <a:t>The type and number of seeds and the temperature</a:t>
+              <a:t>Water, oxygen and a suitable temperature</a:t>
             </a:r>
             <a:endParaRPr lang="en-US" sz="1700" dirty="0"/>
           </a:p>
@@ -2221,7 +2221,7 @@
                 <a:ea typeface="Arial" pitchFamily="34" charset="-122"/>
                 <a:cs typeface="Arial" pitchFamily="34" charset="-120"/>
               </a:rPr>
-              <a:t>Whether the seeds are alive or boiled</a:t>
+              <a:t>Oxygen, soil and fertiliser</a:t>
             </a:r>
             <a:endParaRPr lang="en-US" sz="1700" dirty="0"/>
           </a:p>
@@ -2321,7 +2321,7 @@
                 <a:ea typeface="Arial" pitchFamily="34" charset="-122"/>
                 <a:cs typeface="Arial" pitchFamily="34" charset="-120"/>
               </a:rPr>
-              <a:t>The amount of water given</a:t>
+              <a:t>Light, water and soil</a:t>
             </a:r>
             <a:endParaRPr lang="en-US" sz="1700" dirty="0"/>
           </a:p>
@@ -2421,7 +2421,7 @@
                 <a:ea typeface="Arial" pitchFamily="34" charset="-122"/>
                 <a:cs typeface="Arial" pitchFamily="34" charset="-120"/>
               </a:rPr>
-              <a:t>Whether the cotton wool is wet or dry</a:t>
+              <a:t>Water, light and a suitable temperature</a:t>
             </a:r>
             <a:endParaRPr lang="en-US" sz="1700" dirty="0"/>
           </a:p>
@@ -2623,7 +2623,7 @@
               <a:buNone/>
             </a:pPr>
             <a:r>
-              <a:rPr lang="en-US" sz="2000" b="1" dirty="0">
+              <a:rPr lang="en-US" sz="1800" b="1" dirty="0">
                 <a:solidFill>
                   <a:srgbClr val="FFFFFF"/>
                 </a:solidFill>
@@ -2631,9 +2631,9 @@
                 <a:ea typeface="Arial" pitchFamily="34" charset="-122"/>
                 <a:cs typeface="Arial" pitchFamily="34" charset="-120"/>
               </a:rPr>
-              <a:t>In the germination investigation, one container holds boiled and then cooled maize and bean seeds on moist cotton wool with air and room temperature. Why is this container included?</a:t>
-            </a:r>
-            <a:endParaRPr lang="en-US" sz="2000" dirty="0"/>
+              <a:t>Fatuma set up four jars, each with 20 Rosecoco bean seeds: water + air + 25 °C; dry; no air (boiled cooled water with an oil layer); and wet but kept at 4 °C. Which of these was kept the SAME in all four jars so that the test was fair?</a:t>
+            </a:r>
+            <a:endParaRPr lang="en-US" sz="1800" dirty="0"/>
           </a:p>
         </p:txBody>
       </p:sp>
@@ -2723,7 +2723,7 @@
               <a:buNone/>
             </a:pPr>
             <a:r>
-              <a:rPr lang="en-US" sz="1500" dirty="0">
+              <a:rPr lang="en-US" sz="1700" dirty="0">
                 <a:solidFill>
                   <a:srgbClr val="FFFFFF"/>
                 </a:solidFill>
@@ -2731,9 +2731,9 @@
                 <a:ea typeface="Arial" pitchFamily="34" charset="-122"/>
                 <a:cs typeface="Arial" pitchFamily="34" charset="-120"/>
               </a:rPr>
-              <a:t>To show that a seed must be alive (viable) to germinate even when water, air and warmth are present</a:t>
-            </a:r>
-            <a:endParaRPr lang="en-US" sz="1500" dirty="0"/>
+              <a:t>The oxygen supply</a:t>
+            </a:r>
+            <a:endParaRPr lang="en-US" sz="1700" dirty="0"/>
           </a:p>
         </p:txBody>
       </p:sp>
@@ -2823,7 +2823,7 @@
               <a:buNone/>
             </a:pPr>
             <a:r>
-              <a:rPr lang="en-US" sz="1500" dirty="0">
+              <a:rPr lang="en-US" sz="1700" dirty="0">
                 <a:solidFill>
                   <a:srgbClr val="FFFFFF"/>
                 </a:solidFill>
@@ -2831,9 +2831,9 @@
                 <a:ea typeface="Arial" pitchFamily="34" charset="-122"/>
                 <a:cs typeface="Arial" pitchFamily="34" charset="-120"/>
               </a:rPr>
-              <a:t>To show that seeds need cold conditions to germinate</a:t>
-            </a:r>
-            <a:endParaRPr lang="en-US" sz="1500" dirty="0"/>
+              <a:t>The temperature</a:t>
+            </a:r>
+            <a:endParaRPr lang="en-US" sz="1700" dirty="0"/>
           </a:p>
         </p:txBody>
       </p:sp>
@@ -2923,7 +2923,7 @@
               <a:buNone/>
             </a:pPr>
             <a:r>
-              <a:rPr lang="en-US" sz="1500" dirty="0">
+              <a:rPr lang="en-US" sz="1700" dirty="0">
                 <a:solidFill>
                   <a:srgbClr val="FFFFFF"/>
                 </a:solidFill>
@@ -2931,9 +2931,9 @@
                 <a:ea typeface="Arial" pitchFamily="34" charset="-122"/>
                 <a:cs typeface="Arial" pitchFamily="34" charset="-120"/>
               </a:rPr>
-              <a:t>To show that seeds germinate faster when they are boiled</a:t>
-            </a:r>
-            <a:endParaRPr lang="en-US" sz="1500" dirty="0"/>
+              <a:t>The water supply</a:t>
+            </a:r>
+            <a:endParaRPr lang="en-US" sz="1700" dirty="0"/>
           </a:p>
         </p:txBody>
       </p:sp>
@@ -3023,7 +3023,7 @@
               <a:buNone/>
             </a:pPr>
             <a:r>
-              <a:rPr lang="en-US" sz="1500" dirty="0">
+              <a:rPr lang="en-US" sz="1700" dirty="0">
                 <a:solidFill>
                   <a:srgbClr val="FFFFFF"/>
                 </a:solidFill>
@@ -3031,9 +3031,9 @@
                 <a:ea typeface="Arial" pitchFamily="34" charset="-122"/>
                 <a:cs typeface="Arial" pitchFamily="34" charset="-120"/>
               </a:rPr>
-              <a:t>To show that seeds need more water than the control container</a:t>
-            </a:r>
-            <a:endParaRPr lang="en-US" sz="1500" dirty="0"/>
+              <a:t>The number of seeds (20) and the seed variety</a:t>
+            </a:r>
+            <a:endParaRPr lang="en-US" sz="1700" dirty="0"/>
           </a:p>
         </p:txBody>
       </p:sp>
@@ -3233,7 +3233,7 @@
               <a:buNone/>
             </a:pPr>
             <a:r>
-              <a:rPr lang="en-US" sz="1800" b="1" dirty="0">
+              <a:rPr lang="en-US" sz="2300" b="1" dirty="0">
                 <a:solidFill>
                   <a:srgbClr val="FFFFFF"/>
                 </a:solidFill>
@@ -3241,9 +3241,9 @@
                 <a:ea typeface="Arial" pitchFamily="34" charset="-122"/>
                 <a:cs typeface="Arial" pitchFamily="34" charset="-120"/>
               </a:rPr>
-              <a:t>A learner examines two seedlings. In seedling X, the coleoptile and plumule push up while the cotyledon stays below the soil. In seedling Y, the hypocotyl arches and lifts the cotyledons above the soil. Which statement is correct?</a:t>
-            </a:r>
-            <a:endParaRPr lang="en-US" sz="1800" dirty="0"/>
+              <a:t>A group is counting germinated Rosecoco bean seeds in a jar on Day 5. When should a seed be counted as GERMINATED?</a:t>
+            </a:r>
+            <a:endParaRPr lang="en-US" sz="2300" dirty="0"/>
           </a:p>
         </p:txBody>
       </p:sp>
@@ -3341,7 +3341,7 @@
                 <a:ea typeface="Arial" pitchFamily="34" charset="-122"/>
                 <a:cs typeface="Arial" pitchFamily="34" charset="-120"/>
               </a:rPr>
-              <a:t>Both X and Y are epigeal</a:t>
+              <a:t>When the first leaves open</a:t>
             </a:r>
             <a:endParaRPr lang="en-US" sz="1700" dirty="0"/>
           </a:p>
@@ -3441,7 +3441,7 @@
                 <a:ea typeface="Arial" pitchFamily="34" charset="-122"/>
                 <a:cs typeface="Arial" pitchFamily="34" charset="-120"/>
               </a:rPr>
-              <a:t>X is bean (epigeal) and Y is maize (hypogeal)</a:t>
+              <a:t>When the seed coat becomes soft and swollen</a:t>
             </a:r>
             <a:endParaRPr lang="en-US" sz="1700" dirty="0"/>
           </a:p>
@@ -3541,7 +3541,7 @@
                 <a:ea typeface="Arial" pitchFamily="34" charset="-122"/>
                 <a:cs typeface="Arial" pitchFamily="34" charset="-120"/>
               </a:rPr>
-              <a:t>Both X and Y are hypogeal</a:t>
+              <a:t>When the radicle has come out of the seed</a:t>
             </a:r>
             <a:endParaRPr lang="en-US" sz="1700" dirty="0"/>
           </a:p>
@@ -3641,7 +3641,7 @@
                 <a:ea typeface="Arial" pitchFamily="34" charset="-122"/>
                 <a:cs typeface="Arial" pitchFamily="34" charset="-120"/>
               </a:rPr>
-              <a:t>X is maize (hypogeal) and Y is bean (epigeal)</a:t>
+              <a:t>When the shoot appears above the soil</a:t>
             </a:r>
             <a:endParaRPr lang="en-US" sz="1700" dirty="0"/>
           </a:p>
@@ -3851,7 +3851,7 @@
                 <a:ea typeface="Arial" pitchFamily="34" charset="-122"/>
                 <a:cs typeface="Arial" pitchFamily="34" charset="-120"/>
               </a:rPr>
-              <a:t>Maize seeds are fully submerged in boiled, cooled water with a thin layer of cooking oil on top. After 5 days, very few have germinated, even though there is plenty of water. What is the best explanation?</a:t>
+              <a:t>In Fatuma's set-up, the jar with water at 25 °C but no air (boiled cooled water with an oil layer) had only 1 of 20 seeds germinate. In the jar with water, air and 25 °C, 18 of 20 germinated. What does this comparison show?</a:t>
             </a:r>
             <a:endParaRPr lang="en-US" sz="1800" dirty="0"/>
           </a:p>
@@ -3943,7 +3943,7 @@
               <a:buNone/>
             </a:pPr>
             <a:r>
-              <a:rPr lang="en-US" sz="1300" dirty="0">
+              <a:rPr lang="en-US" sz="1500" dirty="0">
                 <a:solidFill>
                   <a:srgbClr val="FFFFFF"/>
                 </a:solidFill>
@@ -3951,9 +3951,9 @@
                 <a:ea typeface="Arial" pitchFamily="34" charset="-122"/>
                 <a:cs typeface="Arial" pitchFamily="34" charset="-120"/>
               </a:rPr>
-              <a:t>The water was too warm for enzymes to work</a:t>
-            </a:r>
-            <a:endParaRPr lang="en-US" sz="1300" dirty="0"/>
+              <a:t>Water is enough on its own for germination</a:t>
+            </a:r>
+            <a:endParaRPr lang="en-US" sz="1500" dirty="0"/>
           </a:p>
         </p:txBody>
       </p:sp>
@@ -4043,7 +4043,7 @@
               <a:buNone/>
             </a:pPr>
             <a:r>
-              <a:rPr lang="en-US" sz="1300" dirty="0">
+              <a:rPr lang="en-US" sz="1500" dirty="0">
                 <a:solidFill>
                   <a:srgbClr val="FFFFFF"/>
                 </a:solidFill>
@@ -4051,9 +4051,9 @@
                 <a:ea typeface="Arial" pitchFamily="34" charset="-122"/>
                 <a:cs typeface="Arial" pitchFamily="34" charset="-120"/>
               </a:rPr>
-              <a:t>The seeds had no soil to grow in</a:t>
-            </a:r>
-            <a:endParaRPr lang="en-US" sz="1300" dirty="0"/>
+              <a:t>Oxygen is needed, because the embryo uses it in aerobic respiration to release energy for growth</a:t>
+            </a:r>
+            <a:endParaRPr lang="en-US" sz="1500" dirty="0"/>
           </a:p>
         </p:txBody>
       </p:sp>
@@ -4143,7 +4143,7 @@
               <a:buNone/>
             </a:pPr>
             <a:r>
-              <a:rPr lang="en-US" sz="1300" dirty="0">
+              <a:rPr lang="en-US" sz="1500" dirty="0">
                 <a:solidFill>
                   <a:srgbClr val="FFFFFF"/>
                 </a:solidFill>
@@ -4151,9 +4151,9 @@
                 <a:ea typeface="Arial" pitchFamily="34" charset="-122"/>
                 <a:cs typeface="Arial" pitchFamily="34" charset="-120"/>
               </a:rPr>
-              <a:t>The seeds received too much light</a:t>
-            </a:r>
-            <a:endParaRPr lang="en-US" sz="1300" dirty="0"/>
+              <a:t>Light is needed, because the oil layer blocked light</a:t>
+            </a:r>
+            <a:endParaRPr lang="en-US" sz="1500" dirty="0"/>
           </a:p>
         </p:txBody>
       </p:sp>
@@ -4243,7 +4243,7 @@
               <a:buNone/>
             </a:pPr>
             <a:r>
-              <a:rPr lang="en-US" sz="1300" dirty="0">
+              <a:rPr lang="en-US" sz="1500" dirty="0">
                 <a:solidFill>
                   <a:srgbClr val="FFFFFF"/>
                 </a:solidFill>
@@ -4251,9 +4251,9 @@
                 <a:ea typeface="Arial" pitchFamily="34" charset="-122"/>
                 <a:cs typeface="Arial" pitchFamily="34" charset="-120"/>
               </a:rPr>
-              <a:t>Too little oxygen is available for aerobic respiration, so the seeds cannot release the energy needed for germination</a:t>
-            </a:r>
-            <a:endParaRPr lang="en-US" sz="1300" dirty="0"/>
+              <a:t>Oxygen is not needed, because one seed still germinated</a:t>
+            </a:r>
+            <a:endParaRPr lang="en-US" sz="1500" dirty="0"/>
           </a:p>
         </p:txBody>
       </p:sp>
@@ -4461,7 +4461,7 @@
                 <a:ea typeface="Arial" pitchFamily="34" charset="-122"/>
                 <a:cs typeface="Arial" pitchFamily="34" charset="-120"/>
               </a:rPr>
-              <a:t>In a germination test, 9 of 10 bean seeds germinated on moist cotton wool at room temperature with no soil. Which conclusion is supported by this evidence?</a:t>
+              <a:t>On Mr. Wafula's farm, 6 bean seeds and 3 maize seeds failed to germinate in a low patch that was waterlogged after 25 mm of rain. What is the best explanation?</a:t>
             </a:r>
             <a:endParaRPr lang="en-US" sz="2000" dirty="0"/>
           </a:p>
@@ -4553,7 +4553,7 @@
               <a:buNone/>
             </a:pPr>
             <a:r>
-              <a:rPr lang="en-US" sz="1500" dirty="0">
+              <a:rPr lang="en-US" sz="1700" dirty="0">
                 <a:solidFill>
                   <a:srgbClr val="FFFFFF"/>
                 </a:solidFill>
@@ -4561,9 +4561,9 @@
                 <a:ea typeface="Arial" pitchFamily="34" charset="-122"/>
                 <a:cs typeface="Arial" pitchFamily="34" charset="-120"/>
               </a:rPr>
-              <a:t>Seeds need fertiliser to germinate</a:t>
-            </a:r>
-            <a:endParaRPr lang="en-US" sz="1500" dirty="0"/>
+              <a:t>The rain washed away the light the seeds needed</a:t>
+            </a:r>
+            <a:endParaRPr lang="en-US" sz="1700" dirty="0"/>
           </a:p>
         </p:txBody>
       </p:sp>
@@ -4653,7 +4653,7 @@
               <a:buNone/>
             </a:pPr>
             <a:r>
-              <a:rPr lang="en-US" sz="1500" dirty="0">
+              <a:rPr lang="en-US" sz="1700" dirty="0">
                 <a:solidFill>
                   <a:srgbClr val="FFFFFF"/>
                 </a:solidFill>
@@ -4661,9 +4661,9 @@
                 <a:ea typeface="Arial" pitchFamily="34" charset="-122"/>
                 <a:cs typeface="Arial" pitchFamily="34" charset="-120"/>
               </a:rPr>
-              <a:t>Seeds need soil to germinate</a:t>
-            </a:r>
-            <a:endParaRPr lang="en-US" sz="1500" dirty="0"/>
+              <a:t>Water filled the soil pores, so the seeds got too little oxygen</a:t>
+            </a:r>
+            <a:endParaRPr lang="en-US" sz="1700" dirty="0"/>
           </a:p>
         </p:txBody>
       </p:sp>
@@ -4753,7 +4753,7 @@
               <a:buNone/>
             </a:pPr>
             <a:r>
-              <a:rPr lang="en-US" sz="1500" dirty="0">
+              <a:rPr lang="en-US" sz="1700" dirty="0">
                 <a:solidFill>
                   <a:srgbClr val="FFFFFF"/>
                 </a:solidFill>
@@ -4761,9 +4761,9 @@
                 <a:ea typeface="Arial" pitchFamily="34" charset="-122"/>
                 <a:cs typeface="Arial" pitchFamily="34" charset="-120"/>
               </a:rPr>
-              <a:t>Seeds germinate only in the dark</a:t>
-            </a:r>
-            <a:endParaRPr lang="en-US" sz="1500" dirty="0"/>
+              <a:t>The soil became too cold for any seed to absorb water</a:t>
+            </a:r>
+            <a:endParaRPr lang="en-US" sz="1700" dirty="0"/>
           </a:p>
         </p:txBody>
       </p:sp>
@@ -4853,7 +4853,7 @@
               <a:buNone/>
             </a:pPr>
             <a:r>
-              <a:rPr lang="en-US" sz="1500" dirty="0">
+              <a:rPr lang="en-US" sz="1700" dirty="0">
                 <a:solidFill>
                   <a:srgbClr val="FFFFFF"/>
                 </a:solidFill>
@@ -4861,9 +4861,9 @@
                 <a:ea typeface="Arial" pitchFamily="34" charset="-122"/>
                 <a:cs typeface="Arial" pitchFamily="34" charset="-120"/>
               </a:rPr>
-              <a:t>Soil is not necessary for germination if water, oxygen and suitable warmth are present</a:t>
-            </a:r>
-            <a:endParaRPr lang="en-US" sz="1500" dirty="0"/>
+              <a:t>The seeds became dormant because they had too much water</a:t>
+            </a:r>
+            <a:endParaRPr lang="en-US" sz="1700" dirty="0"/>
           </a:p>
         </p:txBody>
       </p:sp>
@@ -5032,7 +5032,7 @@
                 <a:ea typeface="Arial" pitchFamily="34" charset="-122"/>
                 <a:cs typeface="Arial" pitchFamily="34" charset="-120"/>
               </a:rPr>
-              <a:t>Use after: Model Building phase</a:t>
+              <a:t>Use after: Explain phase</a:t>
             </a:r>
             <a:endParaRPr lang="en-US" sz="1100" dirty="0"/>
           </a:p>
@@ -5063,7 +5063,7 @@
               <a:buNone/>
             </a:pPr>
             <a:r>
-              <a:rPr lang="en-US" sz="2300" b="1" dirty="0">
+              <a:rPr lang="en-US" sz="2000" b="1" dirty="0">
                 <a:solidFill>
                   <a:srgbClr val="FFFFFF"/>
                 </a:solidFill>
@@ -5071,9 +5071,9 @@
                 <a:ea typeface="Arial" pitchFamily="34" charset="-122"/>
                 <a:cs typeface="Arial" pitchFamily="34" charset="-120"/>
               </a:rPr>
-              <a:t>Which list shows the correct order of events in the germination of a maize or bean seed?</a:t>
-            </a:r>
-            <a:endParaRPr lang="en-US" sz="2300" dirty="0"/>
+              <a:t>Rosecoco beans show epigeal germination, and the cotyledons are carried above the soil. Which part of the seedling makes this happen?</a:t>
+            </a:r>
+            <a:endParaRPr lang="en-US" sz="2000" dirty="0"/>
           </a:p>
         </p:txBody>
       </p:sp>
@@ -5171,7 +5171,7 @@
                 <a:ea typeface="Arial" pitchFamily="34" charset="-122"/>
                 <a:cs typeface="Arial" pitchFamily="34" charset="-120"/>
               </a:rPr>
-              <a:t>Water uptake, enzymes activated, radicle emerges, plumule emerges</a:t>
+              <a:t>The scutellum grows upwards out of the soil</a:t>
             </a:r>
             <a:endParaRPr lang="en-US" sz="1700" dirty="0"/>
           </a:p>
@@ -5271,7 +5271,7 @@
                 <a:ea typeface="Arial" pitchFamily="34" charset="-122"/>
                 <a:cs typeface="Arial" pitchFamily="34" charset="-120"/>
               </a:rPr>
-              <a:t>Radicle emerges, water uptake, enzymes activated, plumule emerges</a:t>
+              <a:t>The coleoptile pierces the soil and lifts the cotyledons</a:t>
             </a:r>
             <a:endParaRPr lang="en-US" sz="1700" dirty="0"/>
           </a:p>
@@ -5371,7 +5371,7 @@
                 <a:ea typeface="Arial" pitchFamily="34" charset="-122"/>
                 <a:cs typeface="Arial" pitchFamily="34" charset="-120"/>
               </a:rPr>
-              <a:t>Enzymes activated, plumule emerges, water uptake, radicle emerges</a:t>
+              <a:t>The hypocotyl elongates as an arch and pulls the cotyledons above the soil</a:t>
             </a:r>
             <a:endParaRPr lang="en-US" sz="1700" dirty="0"/>
           </a:p>
@@ -5471,7 +5471,7 @@
                 <a:ea typeface="Arial" pitchFamily="34" charset="-122"/>
                 <a:cs typeface="Arial" pitchFamily="34" charset="-120"/>
               </a:rPr>
-              <a:t>Plumule emerges, radicle emerges, water uptake, enzymes activated</a:t>
+              <a:t>The radicle grows upwards to push the cotyledons out</a:t>
             </a:r>
             <a:endParaRPr lang="en-US" sz="1700" dirty="0"/>
           </a:p>
@@ -5673,7 +5673,7 @@
               <a:buNone/>
             </a:pPr>
             <a:r>
-              <a:rPr lang="en-US" sz="2000" b="1" dirty="0">
+              <a:rPr lang="en-US" sz="1800" b="1" dirty="0">
                 <a:solidFill>
                   <a:srgbClr val="FFFFFF"/>
                 </a:solidFill>
@@ -5681,9 +5681,9 @@
                 <a:ea typeface="Arial" pitchFamily="34" charset="-122"/>
                 <a:cs typeface="Arial" pitchFamily="34" charset="-120"/>
               </a:rPr>
-              <a:t>A farmer in Kitale plants healthy-looking maize seeds after good rain. The soil is moist, well aerated and warm, yet some seeds never germinate. Which is the most likely reason?</a:t>
-            </a:r>
-            <a:endParaRPr lang="en-US" sz="2000" dirty="0"/>
+              <a:t>In the time-lapse results, the bean radicle came out on Day 3 and the bean shoot appeared above the soil on Day 8 (emergence). How many days passed between germination and emergence in the bean?</a:t>
+            </a:r>
+            <a:endParaRPr lang="en-US" sz="1800" dirty="0"/>
           </a:p>
         </p:txBody>
       </p:sp>
@@ -5781,7 +5781,7 @@
                 <a:ea typeface="Arial" pitchFamily="34" charset="-122"/>
                 <a:cs typeface="Arial" pitchFamily="34" charset="-120"/>
               </a:rPr>
-              <a:t>The seeds are hypogeal, so they cannot germinate</a:t>
+              <a:t>5 days</a:t>
             </a:r>
             <a:endParaRPr lang="en-US" sz="1700" dirty="0"/>
           </a:p>
@@ -5881,7 +5881,7 @@
                 <a:ea typeface="Arial" pitchFamily="34" charset="-122"/>
                 <a:cs typeface="Arial" pitchFamily="34" charset="-120"/>
               </a:rPr>
-              <a:t>The seeds did not get enough sunlight underground</a:t>
+              <a:t>3 days</a:t>
             </a:r>
             <a:endParaRPr lang="en-US" sz="1700" dirty="0"/>
           </a:p>
@@ -5981,7 +5981,7 @@
                 <a:ea typeface="Arial" pitchFamily="34" charset="-122"/>
                 <a:cs typeface="Arial" pitchFamily="34" charset="-120"/>
               </a:rPr>
-              <a:t>The seeds are dead (not viable) or dormant</a:t>
+              <a:t>8 days</a:t>
             </a:r>
             <a:endParaRPr lang="en-US" sz="1700" dirty="0"/>
           </a:p>
@@ -6081,7 +6081,7 @@
                 <a:ea typeface="Arial" pitchFamily="34" charset="-122"/>
                 <a:cs typeface="Arial" pitchFamily="34" charset="-120"/>
               </a:rPr>
-              <a:t>The soil had too much oxygen</a:t>
+              <a:t>11 days</a:t>
             </a:r>
             <a:endParaRPr lang="en-US" sz="1700" dirty="0"/>
           </a:p>
